--- a/销售PPT-Amazon对标选品系统.pptx
+++ b/销售PPT-Amazon对标选品系统.pptx
@@ -3224,7 +3224,7 @@
                 <a:ea typeface="Microsoft YaHei"/>
                 <a:cs typeface="Microsoft YaHei"/>
               </a:rPr>
-              <a:t>AI 驱动 · 不用 RPA · Keepa 数据 + 大模型</a:t>
+              <a:t>AI 驱动 · 不用 RPA · 第三方数据 + 大模型</a:t>
             </a:r>
           </a:p>
         </p:txBody>
@@ -4519,7 +4519,7 @@
                 <a:ea typeface="Microsoft YaHei"/>
                 <a:cs typeface="Microsoft YaHei"/>
               </a:rPr>
-              <a:t>     Keepa 订阅 + AI 调用 + 服务器(商标核验用 EUIPO 免费 API)</a:t>
+              <a:t>     数据订阅 + AI 调用 + 服务器(商标核验用官方公开数据,免费)</a:t>
             </a:r>
           </a:p>
           <a:p>
@@ -5880,7 +5880,7 @@
                 <a:ea typeface="Microsoft YaHei"/>
                 <a:cs typeface="Microsoft YaHei"/>
               </a:rPr>
-              <a:t>没有就上亚马逊德国,用 4–5 种排序一个个搜、一张张点开看</a:t>
+              <a:t>没有就上亚马逊(多国站点),用 4–5 种排序一个个搜、一张张点开看</a:t>
             </a:r>
           </a:p>
           <a:p>
@@ -6479,7 +6479,7 @@
                 <a:ea typeface="Microsoft YaHei"/>
                 <a:cs typeface="Microsoft YaHei"/>
               </a:rPr>
-              <a:t>用 Keepa 官方数据,不碰反爬</a:t>
+              <a:t>用第三方官方数据,不碰反爬</a:t>
             </a:r>
           </a:p>
         </p:txBody>
@@ -7444,7 +7444,7 @@
                 <a:ea typeface="Microsoft YaHei"/>
                 <a:cs typeface="Microsoft YaHei"/>
               </a:rPr>
-              <a:t>Keepa 检索</a:t>
+              <a:t>第三方数据检索</a:t>
             </a:r>
           </a:p>
         </p:txBody>
@@ -8661,7 +8661,7 @@
                 <a:ea typeface="Microsoft YaHei"/>
                 <a:cs typeface="Microsoft YaHei"/>
               </a:rPr>
-              <a:t>电商翻译 → Keepa 检索 → 相似度分析 → 三重核验 → 按要求择优,推荐含价格/销量/评论的可用对标。</a:t>
+              <a:t>电商翻译 → 第三方数据检索 → 相似度分析 → 三重核验 → 按要求择优,推荐含价格/销量/评论的可用对标。</a:t>
             </a:r>
           </a:p>
         </p:txBody>
@@ -9419,7 +9419,7 @@
                 <a:ea typeface="Microsoft YaHei"/>
                 <a:cs typeface="Microsoft YaHei"/>
               </a:rPr>
-              <a:t>语义检索 + Keepa 数据,相似即命中</a:t>
+              <a:t>语义检索 + 第三方数据,相似即命中</a:t>
             </a:r>
           </a:p>
         </p:txBody>
@@ -10269,7 +10269,7 @@
                 <a:ea typeface="Microsoft YaHei"/>
                 <a:cs typeface="Microsoft YaHei"/>
               </a:rPr>
-              <a:t>不用 RPA:Keepa API + AI</a:t>
+              <a:t>不用 RPA:第三方数据 API + AI</a:t>
             </a:r>
           </a:p>
         </p:txBody>
@@ -10339,7 +10339,7 @@
                 <a:ea typeface="Microsoft YaHei"/>
                 <a:cs typeface="Microsoft YaHei"/>
               </a:rPr>
-              <a:t>     用 Keepa 官方商用 API,不碰反爬、不踩验证码、无封号风险</a:t>
+              <a:t>     用第三方官方商用数据 API,不碰反爬、不踩验证码、无封号风险</a:t>
             </a:r>
           </a:p>
           <a:p>
@@ -10433,7 +10433,7 @@
                 <a:ea typeface="Microsoft YaHei"/>
                 <a:cs typeface="Microsoft YaHei"/>
               </a:rPr>
-              <a:t>     Keepa 自带价格历史 + 销量排名(BSR)+ 评论,正好满足销量/评分/最便宜的选品</a:t>
+              <a:t>     第三方数据自带价格历史 + 销量 + 评论,正好满足销量/评分/最便宜的选品</a:t>
             </a:r>
           </a:p>
         </p:txBody>
